--- a/Report/RV32I Pipeline Midterm.pptx
+++ b/Report/RV32I Pipeline Midterm.pptx
@@ -149,87 +149,37 @@
 <pc:chgInfo xmlns:a="http://schemas.openxmlformats.org/drawingml/2006/main" xmlns:r="http://schemas.openxmlformats.org/officeDocument/2006/relationships" xmlns:ac="http://schemas.microsoft.com/office/drawing/2013/main/command" xmlns:pc="http://schemas.microsoft.com/office/powerpoint/2013/main/command">
   <pc:docChgLst>
     <pc:chgData name="Kantaphon Kitsanakarakat" userId="34fbd52d53948f28" providerId="LiveId" clId="{2ACBE802-F97E-4423-8328-9FB178187958}"/>
-    <pc:docChg chg="custSel modSld">
-      <pc:chgData name="Kantaphon Kitsanakarakat" userId="34fbd52d53948f28" providerId="LiveId" clId="{2ACBE802-F97E-4423-8328-9FB178187958}" dt="2026-09-09T12:30:44.872" v="53" actId="1076"/>
+    <pc:docChg chg="undo custSel addSld delSld modSld sldOrd">
+      <pc:chgData name="Kantaphon Kitsanakarakat" userId="34fbd52d53948f28" providerId="LiveId" clId="{2ACBE802-F97E-4423-8328-9FB178187958}" dt="2026-09-14T10:27:05.366" v="57" actId="47"/>
       <pc:docMkLst>
         <pc:docMk/>
       </pc:docMkLst>
+      <pc:sldChg chg="add del">
+        <pc:chgData name="Kantaphon Kitsanakarakat" userId="34fbd52d53948f28" providerId="LiveId" clId="{2ACBE802-F97E-4423-8328-9FB178187958}" dt="2026-09-14T10:27:05.366" v="57" actId="47"/>
+        <pc:sldMkLst>
+          <pc:docMk/>
+          <pc:sldMk cId="0" sldId="267"/>
+        </pc:sldMkLst>
+      </pc:sldChg>
+      <pc:sldChg chg="ord">
+        <pc:chgData name="Kantaphon Kitsanakarakat" userId="34fbd52d53948f28" providerId="LiveId" clId="{2ACBE802-F97E-4423-8328-9FB178187958}" dt="2026-09-10T03:12:09.035" v="55"/>
+        <pc:sldMkLst>
+          <pc:docMk/>
+          <pc:sldMk cId="0" sldId="269"/>
+        </pc:sldMkLst>
+      </pc:sldChg>
       <pc:sldChg chg="addSp delSp modSp mod">
         <pc:chgData name="Kantaphon Kitsanakarakat" userId="34fbd52d53948f28" providerId="LiveId" clId="{2ACBE802-F97E-4423-8328-9FB178187958}" dt="2026-09-09T12:30:06.669" v="47" actId="1076"/>
         <pc:sldMkLst>
           <pc:docMk/>
           <pc:sldMk cId="0" sldId="272"/>
         </pc:sldMkLst>
-        <pc:spChg chg="del">
-          <ac:chgData name="Kantaphon Kitsanakarakat" userId="34fbd52d53948f28" providerId="LiveId" clId="{2ACBE802-F97E-4423-8328-9FB178187958}" dt="2026-09-09T12:28:34.142" v="5" actId="478"/>
-          <ac:spMkLst>
-            <pc:docMk/>
-            <pc:sldMk cId="0" sldId="272"/>
-            <ac:spMk id="58" creationId="{00000000-0000-0000-0000-000000000000}"/>
-          </ac:spMkLst>
-        </pc:spChg>
-        <pc:spChg chg="del">
-          <ac:chgData name="Kantaphon Kitsanakarakat" userId="34fbd52d53948f28" providerId="LiveId" clId="{2ACBE802-F97E-4423-8328-9FB178187958}" dt="2026-09-09T12:28:37.983" v="7" actId="478"/>
-          <ac:spMkLst>
-            <pc:docMk/>
-            <pc:sldMk cId="0" sldId="272"/>
-            <ac:spMk id="59" creationId="{00000000-0000-0000-0000-000000000000}"/>
-          </ac:spMkLst>
-        </pc:spChg>
-        <pc:spChg chg="del mod">
-          <ac:chgData name="Kantaphon Kitsanakarakat" userId="34fbd52d53948f28" providerId="LiveId" clId="{2ACBE802-F97E-4423-8328-9FB178187958}" dt="2026-09-09T12:28:40.873" v="11" actId="478"/>
-          <ac:spMkLst>
-            <pc:docMk/>
-            <pc:sldMk cId="0" sldId="272"/>
-            <ac:spMk id="60" creationId="{00000000-0000-0000-0000-000000000000}"/>
-          </ac:spMkLst>
-        </pc:spChg>
-        <pc:spChg chg="del">
-          <ac:chgData name="Kantaphon Kitsanakarakat" userId="34fbd52d53948f28" providerId="LiveId" clId="{2ACBE802-F97E-4423-8328-9FB178187958}" dt="2026-09-09T12:28:36.793" v="6" actId="478"/>
-          <ac:spMkLst>
-            <pc:docMk/>
-            <pc:sldMk cId="0" sldId="272"/>
-            <ac:spMk id="61" creationId="{00000000-0000-0000-0000-000000000000}"/>
-          </ac:spMkLst>
-        </pc:spChg>
-        <pc:spChg chg="del">
-          <ac:chgData name="Kantaphon Kitsanakarakat" userId="34fbd52d53948f28" providerId="LiveId" clId="{2ACBE802-F97E-4423-8328-9FB178187958}" dt="2026-09-09T12:28:41.448" v="12" actId="478"/>
-          <ac:spMkLst>
-            <pc:docMk/>
-            <pc:sldMk cId="0" sldId="272"/>
-            <ac:spMk id="62" creationId="{00000000-0000-0000-0000-000000000000}"/>
-          </ac:spMkLst>
-        </pc:spChg>
-        <pc:spChg chg="del mod">
-          <ac:chgData name="Kantaphon Kitsanakarakat" userId="34fbd52d53948f28" providerId="LiveId" clId="{2ACBE802-F97E-4423-8328-9FB178187958}" dt="2026-09-09T12:28:43.293" v="14" actId="478"/>
-          <ac:spMkLst>
-            <pc:docMk/>
-            <pc:sldMk cId="0" sldId="272"/>
-            <ac:spMk id="63" creationId="{00000000-0000-0000-0000-000000000000}"/>
-          </ac:spMkLst>
-        </pc:spChg>
         <pc:picChg chg="add mod">
           <ac:chgData name="Kantaphon Kitsanakarakat" userId="34fbd52d53948f28" providerId="LiveId" clId="{2ACBE802-F97E-4423-8328-9FB178187958}" dt="2026-09-09T12:30:06.669" v="47" actId="1076"/>
           <ac:picMkLst>
             <pc:docMk/>
             <pc:sldMk cId="0" sldId="272"/>
             <ac:picMk id="68" creationId="{9AB61EF2-AF7D-8E7A-8477-2A05A1E6EC47}"/>
-          </ac:picMkLst>
-        </pc:picChg>
-        <pc:picChg chg="add del mod">
-          <ac:chgData name="Kantaphon Kitsanakarakat" userId="34fbd52d53948f28" providerId="LiveId" clId="{2ACBE802-F97E-4423-8328-9FB178187958}" dt="2026-09-09T12:28:56.035" v="20" actId="478"/>
-          <ac:picMkLst>
-            <pc:docMk/>
-            <pc:sldMk cId="0" sldId="272"/>
-            <ac:picMk id="70" creationId="{0424E62B-B9FB-B217-02E3-F0C4D7C11FA4}"/>
-          </ac:picMkLst>
-        </pc:picChg>
-        <pc:picChg chg="add del mod">
-          <ac:chgData name="Kantaphon Kitsanakarakat" userId="34fbd52d53948f28" providerId="LiveId" clId="{2ACBE802-F97E-4423-8328-9FB178187958}" dt="2026-09-09T12:28:56.035" v="20" actId="478"/>
-          <ac:picMkLst>
-            <pc:docMk/>
-            <pc:sldMk cId="0" sldId="272"/>
-            <ac:picMk id="72" creationId="{22A90903-B7AA-070C-F4B2-8074D3761A0A}"/>
           </ac:picMkLst>
         </pc:picChg>
         <pc:picChg chg="add mod">
@@ -255,54 +205,6 @@
           <pc:docMk/>
           <pc:sldMk cId="0" sldId="274"/>
         </pc:sldMkLst>
-        <pc:spChg chg="del">
-          <ac:chgData name="Kantaphon Kitsanakarakat" userId="34fbd52d53948f28" providerId="LiveId" clId="{2ACBE802-F97E-4423-8328-9FB178187958}" dt="2026-09-09T12:30:30.232" v="48" actId="478"/>
-          <ac:spMkLst>
-            <pc:docMk/>
-            <pc:sldMk cId="0" sldId="274"/>
-            <ac:spMk id="16" creationId="{00000000-0000-0000-0000-000000000000}"/>
-          </ac:spMkLst>
-        </pc:spChg>
-        <pc:spChg chg="del">
-          <ac:chgData name="Kantaphon Kitsanakarakat" userId="34fbd52d53948f28" providerId="LiveId" clId="{2ACBE802-F97E-4423-8328-9FB178187958}" dt="2026-09-09T12:30:30.232" v="48" actId="478"/>
-          <ac:spMkLst>
-            <pc:docMk/>
-            <pc:sldMk cId="0" sldId="274"/>
-            <ac:spMk id="17" creationId="{00000000-0000-0000-0000-000000000000}"/>
-          </ac:spMkLst>
-        </pc:spChg>
-        <pc:spChg chg="del">
-          <ac:chgData name="Kantaphon Kitsanakarakat" userId="34fbd52d53948f28" providerId="LiveId" clId="{2ACBE802-F97E-4423-8328-9FB178187958}" dt="2026-09-09T12:30:30.232" v="48" actId="478"/>
-          <ac:spMkLst>
-            <pc:docMk/>
-            <pc:sldMk cId="0" sldId="274"/>
-            <ac:spMk id="18" creationId="{00000000-0000-0000-0000-000000000000}"/>
-          </ac:spMkLst>
-        </pc:spChg>
-        <pc:spChg chg="del">
-          <ac:chgData name="Kantaphon Kitsanakarakat" userId="34fbd52d53948f28" providerId="LiveId" clId="{2ACBE802-F97E-4423-8328-9FB178187958}" dt="2026-09-09T12:30:30.232" v="48" actId="478"/>
-          <ac:spMkLst>
-            <pc:docMk/>
-            <pc:sldMk cId="0" sldId="274"/>
-            <ac:spMk id="19" creationId="{00000000-0000-0000-0000-000000000000}"/>
-          </ac:spMkLst>
-        </pc:spChg>
-        <pc:spChg chg="del">
-          <ac:chgData name="Kantaphon Kitsanakarakat" userId="34fbd52d53948f28" providerId="LiveId" clId="{2ACBE802-F97E-4423-8328-9FB178187958}" dt="2026-09-09T12:30:30.232" v="48" actId="478"/>
-          <ac:spMkLst>
-            <pc:docMk/>
-            <pc:sldMk cId="0" sldId="274"/>
-            <ac:spMk id="20" creationId="{00000000-0000-0000-0000-000000000000}"/>
-          </ac:spMkLst>
-        </pc:spChg>
-        <pc:spChg chg="del">
-          <ac:chgData name="Kantaphon Kitsanakarakat" userId="34fbd52d53948f28" providerId="LiveId" clId="{2ACBE802-F97E-4423-8328-9FB178187958}" dt="2026-09-09T12:30:30.232" v="48" actId="478"/>
-          <ac:spMkLst>
-            <pc:docMk/>
-            <pc:sldMk cId="0" sldId="274"/>
-            <ac:spMk id="21" creationId="{00000000-0000-0000-0000-000000000000}"/>
-          </ac:spMkLst>
-        </pc:spChg>
         <pc:picChg chg="add mod">
           <ac:chgData name="Kantaphon Kitsanakarakat" userId="34fbd52d53948f28" providerId="LiveId" clId="{2ACBE802-F97E-4423-8328-9FB178187958}" dt="2026-09-09T12:30:44.872" v="53" actId="1076"/>
           <ac:picMkLst>
@@ -496,7 +398,7 @@
           <a:p>
             <a:fld id="{5BCAD085-E8A6-8845-BD4E-CB4CCA059FC4}" type="datetimeFigureOut">
               <a:rPr lang="en-US" smtClean="0"/>
-              <a:t>9/9/2026</a:t>
+              <a:t>9/14/2026</a:t>
             </a:fld>
             <a:endParaRPr lang="en-US"/>
           </a:p>
@@ -664,7 +566,7 @@
           <a:p>
             <a:fld id="{5BCAD085-E8A6-8845-BD4E-CB4CCA059FC4}" type="datetimeFigureOut">
               <a:rPr lang="en-US" smtClean="0"/>
-              <a:t>9/9/2026</a:t>
+              <a:t>9/14/2026</a:t>
             </a:fld>
             <a:endParaRPr lang="en-US"/>
           </a:p>
@@ -842,7 +744,7 @@
           <a:p>
             <a:fld id="{5BCAD085-E8A6-8845-BD4E-CB4CCA059FC4}" type="datetimeFigureOut">
               <a:rPr lang="en-US" smtClean="0"/>
-              <a:t>9/9/2026</a:t>
+              <a:t>9/14/2026</a:t>
             </a:fld>
             <a:endParaRPr lang="en-US"/>
           </a:p>
@@ -1010,7 +912,7 @@
           <a:p>
             <a:fld id="{5BCAD085-E8A6-8845-BD4E-CB4CCA059FC4}" type="datetimeFigureOut">
               <a:rPr lang="en-US" smtClean="0"/>
-              <a:t>9/9/2026</a:t>
+              <a:t>9/14/2026</a:t>
             </a:fld>
             <a:endParaRPr lang="en-US"/>
           </a:p>
@@ -1255,7 +1157,7 @@
           <a:p>
             <a:fld id="{5BCAD085-E8A6-8845-BD4E-CB4CCA059FC4}" type="datetimeFigureOut">
               <a:rPr lang="en-US" smtClean="0"/>
-              <a:t>9/9/2026</a:t>
+              <a:t>9/14/2026</a:t>
             </a:fld>
             <a:endParaRPr lang="en-US"/>
           </a:p>
@@ -1540,7 +1442,7 @@
           <a:p>
             <a:fld id="{5BCAD085-E8A6-8845-BD4E-CB4CCA059FC4}" type="datetimeFigureOut">
               <a:rPr lang="en-US" smtClean="0"/>
-              <a:t>9/9/2026</a:t>
+              <a:t>9/14/2026</a:t>
             </a:fld>
             <a:endParaRPr lang="en-US"/>
           </a:p>
@@ -1959,7 +1861,7 @@
           <a:p>
             <a:fld id="{5BCAD085-E8A6-8845-BD4E-CB4CCA059FC4}" type="datetimeFigureOut">
               <a:rPr lang="en-US" smtClean="0"/>
-              <a:t>9/9/2026</a:t>
+              <a:t>9/14/2026</a:t>
             </a:fld>
             <a:endParaRPr lang="en-US"/>
           </a:p>
@@ -2076,7 +1978,7 @@
           <a:p>
             <a:fld id="{5BCAD085-E8A6-8845-BD4E-CB4CCA059FC4}" type="datetimeFigureOut">
               <a:rPr lang="en-US" smtClean="0"/>
-              <a:t>9/9/2026</a:t>
+              <a:t>9/14/2026</a:t>
             </a:fld>
             <a:endParaRPr lang="en-US"/>
           </a:p>
@@ -2171,7 +2073,7 @@
           <a:p>
             <a:fld id="{5BCAD085-E8A6-8845-BD4E-CB4CCA059FC4}" type="datetimeFigureOut">
               <a:rPr lang="en-US" smtClean="0"/>
-              <a:t>9/9/2026</a:t>
+              <a:t>9/14/2026</a:t>
             </a:fld>
             <a:endParaRPr lang="en-US"/>
           </a:p>
@@ -2446,7 +2348,7 @@
           <a:p>
             <a:fld id="{5BCAD085-E8A6-8845-BD4E-CB4CCA059FC4}" type="datetimeFigureOut">
               <a:rPr lang="en-US" smtClean="0"/>
-              <a:t>9/9/2026</a:t>
+              <a:t>9/14/2026</a:t>
             </a:fld>
             <a:endParaRPr lang="en-US"/>
           </a:p>
@@ -2698,7 +2600,7 @@
           <a:p>
             <a:fld id="{5BCAD085-E8A6-8845-BD4E-CB4CCA059FC4}" type="datetimeFigureOut">
               <a:rPr lang="en-US" smtClean="0"/>
-              <a:t>9/9/2026</a:t>
+              <a:t>9/14/2026</a:t>
             </a:fld>
             <a:endParaRPr lang="en-US"/>
           </a:p>
@@ -2909,7 +2811,7 @@
           <a:p>
             <a:fld id="{5BCAD085-E8A6-8845-BD4E-CB4CCA059FC4}" type="datetimeFigureOut">
               <a:rPr lang="en-US" smtClean="0"/>
-              <a:t>9/9/2026</a:t>
+              <a:t>9/14/2026</a:t>
             </a:fld>
             <a:endParaRPr lang="en-US"/>
           </a:p>
